--- a/slides/AFS-DAFITC-2026-Accelerating-Mission-Readiness-v23.pptx
+++ b/slides/AFS-DAFITC-2026-Accelerating-Mission-Readiness-v23.pptx
@@ -2027,10 +2027,8 @@
           <a:lstStyle/>
           <a:p>
             <a:r>
-              <a:rPr lang="en-US" dirty="0"/>
-              <a:t>The DoD defined trustworthy in 2020 as five principles: responsible, equitable, traceable, reliable, and governable. [DoD AI Ethics Principles, February 2020; DoD Responsible AI Strategy and Implementation Pathway, June 2022.] The one that governs AI you turn loose in a mission is governable: the system detects unintended behavior and can disengage on command. If the only thing stopping an AI from doing the wrong thing is its own promise in a system prompt, you do not have a guardrail. You have a request. It can be jailbroken, and it drifts as the model changes. A real guardrail lives in the infrastructure. The action is blocked before the model ever decides, and every attempt is logged. A model is probabilistic; the same input does not produce the same output twice. Deterministic software gives the same result every time. That is why a promise inside the model cannot be a control and a rule outside it can. There is a live example from earlier this year. A customer-facing ordering bot was asked to solve a student's programming homework before taking their order. It did, then asked if they were ready to order. [S20] Nothing in that system's instructions told it to do homework. Nothing stopped it either, because the only thing in the way was a request. And this is why guardrails are not a second subject in this talk. In a high-risk environment you cannot claim a measured outcome on a mission workflow unless the enforcement is deterministic. They are the reason the outcome is trustworthy. And we demonstrate it, three beats. A request inside policy executes. A request outside policy, where the operator pushes and the model agrees to answer anyway. Then the call is denied at the policy layer before it executes. On how bypassable a self-enforced guardrail is: large reasoning models acting as autonomous jailbreak agents reached a 97.14 percent jailbreak success rate across model combinations. [Nature Communications, 2026.]</a:t>
-            </a:r>
-            <a:endParaRPr lang="en-US" dirty="0"/>
+              <a:t>The DoD defined trustworthy in 2020 as five principles: responsible, equitable, traceable, reliable, and governable. [DoD AI Ethics Principles, February 2020; DoD Responsible AI Strategy and Implementation Pathway, June 2022.] The one that governs AI you turn loose in a mission is governable: the system detects unintended behavior and can disengage on command. If the only thing stopping an AI from doing the wrong thing is its own promise in a system prompt, you do not have a guardrail. You have a request. It can be jailbroken, and it drifts as the model changes. A real guardrail lives in the infrastructure. The action is blocked before the model ever decides, and every attempt is logged. A model is probabilistic; the same input does not produce the same output twice. Deterministic software gives the same result every time. That is why a promise inside the model cannot be a control and a rule outside it can. And this is why guardrails are not a second subject in this talk. In a high-risk environment you cannot claim a measured outcome on a mission workflow unless the enforcement is deterministic. They are the reason the outcome is trustworthy. And we demonstrate it, three beats. A request inside policy executes. A request outside policy, where the operator pushes and the model agrees to answer anyway. Then the call is denied at the policy layer before it executes. On how bypassable a self-enforced guardrail is: large reasoning models acting as autonomous jailbreak agents reached a 97.14 percent jailbreak success rate across model combinations. [Nature Communications, 2026.]</a:t>
+            </a:r>
           </a:p>
         </p:txBody>
       </p:sp>
@@ -3579,6 +3577,10 @@
           </a:gradFill>
           <a:ln/>
         </p:spPr>
+        <p:txBody>
+          <a:bodyPr/>
+          <a:p/>
+        </p:txBody>
       </p:sp>
       <p:pic>
         <p:nvPicPr>
@@ -4163,6 +4165,10 @@
           </a:solidFill>
           <a:ln/>
         </p:spPr>
+        <p:txBody>
+          <a:bodyPr/>
+          <a:p/>
+        </p:txBody>
       </p:sp>
       <p:sp>
         <p:nvSpPr>
@@ -4315,6 +4321,10 @@
           </a:solidFill>
           <a:ln/>
         </p:spPr>
+        <p:txBody>
+          <a:bodyPr/>
+          <a:p/>
+        </p:txBody>
       </p:sp>
       <p:sp>
         <p:nvSpPr>
@@ -4467,6 +4477,10 @@
           </a:solidFill>
           <a:ln/>
         </p:spPr>
+        <p:txBody>
+          <a:bodyPr/>
+          <a:p/>
+        </p:txBody>
       </p:sp>
       <p:pic>
         <p:nvPicPr>
@@ -4887,6 +4901,10 @@
             <a:prstDash val="solid"/>
           </a:ln>
         </p:spPr>
+        <p:txBody>
+          <a:bodyPr/>
+          <a:p/>
+        </p:txBody>
       </p:sp>
       <p:sp>
         <p:nvSpPr>
@@ -4953,6 +4971,10 @@
           </a:solidFill>
           <a:ln/>
         </p:spPr>
+        <p:txBody>
+          <a:bodyPr/>
+          <a:p/>
+        </p:txBody>
       </p:sp>
       <p:sp>
         <p:nvSpPr>
@@ -5021,6 +5043,10 @@
             <a:prstDash val="solid"/>
           </a:ln>
         </p:spPr>
+        <p:txBody>
+          <a:bodyPr/>
+          <a:p/>
+        </p:txBody>
       </p:sp>
       <p:sp>
         <p:nvSpPr>
@@ -5517,6 +5543,10 @@
           </a:solidFill>
           <a:ln/>
         </p:spPr>
+        <p:txBody>
+          <a:bodyPr/>
+          <a:p/>
+        </p:txBody>
       </p:sp>
       <p:sp>
         <p:nvSpPr>
@@ -5642,6 +5672,10 @@
           </a:solidFill>
           <a:ln/>
         </p:spPr>
+        <p:txBody>
+          <a:bodyPr/>
+          <a:p/>
+        </p:txBody>
       </p:sp>
       <p:pic>
         <p:nvPicPr>
@@ -6062,6 +6096,10 @@
             <a:prstDash val="solid"/>
           </a:ln>
         </p:spPr>
+        <p:txBody>
+          <a:bodyPr/>
+          <a:p/>
+        </p:txBody>
       </p:sp>
       <p:pic>
         <p:nvPicPr>
@@ -6183,6 +6221,10 @@
           </a:solidFill>
           <a:ln/>
         </p:spPr>
+        <p:txBody>
+          <a:bodyPr/>
+          <a:p/>
+        </p:txBody>
       </p:sp>
       <p:sp>
         <p:nvSpPr>
@@ -6757,6 +6799,10 @@
             <a:prstDash val="solid"/>
           </a:ln>
         </p:spPr>
+        <p:txBody>
+          <a:bodyPr/>
+          <a:p/>
+        </p:txBody>
       </p:sp>
       <p:sp>
         <p:nvSpPr>
@@ -6827,6 +6873,10 @@
             <a:prstDash val="solid"/>
           </a:ln>
         </p:spPr>
+        <p:txBody>
+          <a:bodyPr/>
+          <a:p/>
+        </p:txBody>
       </p:sp>
       <p:sp>
         <p:nvSpPr>
@@ -6893,6 +6943,10 @@
           </a:solidFill>
           <a:ln/>
         </p:spPr>
+        <p:txBody>
+          <a:bodyPr/>
+          <a:p/>
+        </p:txBody>
       </p:sp>
       <p:sp>
         <p:nvSpPr>
@@ -7239,6 +7293,10 @@
           </a:solidFill>
           <a:ln/>
         </p:spPr>
+        <p:txBody>
+          <a:bodyPr/>
+          <a:p/>
+        </p:txBody>
       </p:sp>
       <p:sp>
         <p:nvSpPr>
@@ -7391,6 +7449,10 @@
           </a:solidFill>
           <a:ln/>
         </p:spPr>
+        <p:txBody>
+          <a:bodyPr/>
+          <a:p/>
+        </p:txBody>
       </p:sp>
       <p:sp>
         <p:nvSpPr>
@@ -7543,6 +7605,10 @@
           </a:solidFill>
           <a:ln/>
         </p:spPr>
+        <p:txBody>
+          <a:bodyPr/>
+          <a:p/>
+        </p:txBody>
       </p:sp>
       <p:sp>
         <p:nvSpPr>
@@ -7695,6 +7761,10 @@
           </a:solidFill>
           <a:ln/>
         </p:spPr>
+        <p:txBody>
+          <a:bodyPr/>
+          <a:p/>
+        </p:txBody>
       </p:sp>
       <p:pic>
         <p:nvPicPr>
@@ -8065,6 +8135,10 @@
           </a:solidFill>
           <a:ln/>
         </p:spPr>
+        <p:txBody>
+          <a:bodyPr/>
+          <a:p/>
+        </p:txBody>
       </p:sp>
       <p:sp>
         <p:nvSpPr>
@@ -8173,6 +8247,10 @@
           </a:solidFill>
           <a:ln/>
         </p:spPr>
+        <p:txBody>
+          <a:bodyPr/>
+          <a:p/>
+        </p:txBody>
       </p:sp>
       <p:sp>
         <p:nvSpPr>
@@ -8281,6 +8359,10 @@
           </a:solidFill>
           <a:ln/>
         </p:spPr>
+        <p:txBody>
+          <a:bodyPr/>
+          <a:p/>
+        </p:txBody>
       </p:sp>
       <p:sp>
         <p:nvSpPr>
@@ -8389,6 +8471,10 @@
           </a:solidFill>
           <a:ln/>
         </p:spPr>
+        <p:txBody>
+          <a:bodyPr/>
+          <a:p/>
+        </p:txBody>
       </p:sp>
       <p:sp>
         <p:nvSpPr>
@@ -8497,6 +8583,10 @@
           </a:solidFill>
           <a:ln/>
         </p:spPr>
+        <p:txBody>
+          <a:bodyPr/>
+          <a:p/>
+        </p:txBody>
       </p:sp>
       <p:sp>
         <p:nvSpPr>
@@ -8622,6 +8712,10 @@
           </a:solidFill>
           <a:ln/>
         </p:spPr>
+        <p:txBody>
+          <a:bodyPr/>
+          <a:p/>
+        </p:txBody>
       </p:sp>
       <p:pic>
         <p:nvPicPr>
@@ -9112,6 +9206,10 @@
             <a:prstDash val="solid"/>
           </a:ln>
         </p:spPr>
+        <p:txBody>
+          <a:bodyPr/>
+          <a:p/>
+        </p:txBody>
       </p:sp>
       <p:sp>
         <p:nvSpPr>
@@ -9176,6 +9274,10 @@
           </a:solidFill>
           <a:ln/>
         </p:spPr>
+        <p:txBody>
+          <a:bodyPr/>
+          <a:p/>
+        </p:txBody>
       </p:sp>
       <p:sp>
         <p:nvSpPr>
@@ -9284,6 +9386,10 @@
           </a:solidFill>
           <a:ln/>
         </p:spPr>
+        <p:txBody>
+          <a:bodyPr/>
+          <a:p/>
+        </p:txBody>
       </p:sp>
       <p:sp>
         <p:nvSpPr>
@@ -9392,6 +9498,10 @@
           </a:solidFill>
           <a:ln/>
         </p:spPr>
+        <p:txBody>
+          <a:bodyPr/>
+          <a:p/>
+        </p:txBody>
       </p:sp>
       <p:sp>
         <p:nvSpPr>
@@ -9500,6 +9610,10 @@
           </a:solidFill>
           <a:ln/>
         </p:spPr>
+        <p:txBody>
+          <a:bodyPr/>
+          <a:p/>
+        </p:txBody>
       </p:sp>
       <p:sp>
         <p:nvSpPr>
@@ -9608,6 +9722,10 @@
           </a:solidFill>
           <a:ln/>
         </p:spPr>
+        <p:txBody>
+          <a:bodyPr/>
+          <a:p/>
+        </p:txBody>
       </p:sp>
       <p:sp>
         <p:nvSpPr>
@@ -9674,6 +9792,10 @@
           </a:solidFill>
           <a:ln/>
         </p:spPr>
+        <p:txBody>
+          <a:bodyPr/>
+          <a:p/>
+        </p:txBody>
       </p:sp>
       <p:sp>
         <p:nvSpPr>
@@ -9786,6 +9908,10 @@
           </a:solidFill>
           <a:ln/>
         </p:spPr>
+        <p:txBody>
+          <a:bodyPr/>
+          <a:p/>
+        </p:txBody>
       </p:sp>
       <p:sp>
         <p:nvSpPr>
@@ -9898,6 +10024,10 @@
           </a:solidFill>
           <a:ln/>
         </p:spPr>
+        <p:txBody>
+          <a:bodyPr/>
+          <a:p/>
+        </p:txBody>
       </p:sp>
       <p:sp>
         <p:nvSpPr>
@@ -10010,6 +10140,10 @@
           </a:solidFill>
           <a:ln/>
         </p:spPr>
+        <p:txBody>
+          <a:bodyPr/>
+          <a:p/>
+        </p:txBody>
       </p:sp>
       <p:sp>
         <p:nvSpPr>
@@ -10507,6 +10641,10 @@
             <a:prstDash val="solid"/>
           </a:ln>
         </p:spPr>
+        <p:txBody>
+          <a:bodyPr/>
+          <a:p/>
+        </p:txBody>
       </p:sp>
       <p:pic>
         <p:nvPicPr>
@@ -10605,6 +10743,10 @@
           </a:solidFill>
           <a:ln/>
         </p:spPr>
+        <p:txBody>
+          <a:bodyPr/>
+          <a:p/>
+        </p:txBody>
       </p:sp>
       <p:sp>
         <p:nvSpPr>
@@ -10949,6 +11091,10 @@
           </a:gradFill>
           <a:ln/>
         </p:spPr>
+        <p:txBody>
+          <a:bodyPr/>
+          <a:p/>
+        </p:txBody>
       </p:sp>
       <p:pic>
         <p:nvPicPr>
@@ -11119,6 +11265,10 @@
           </a:solidFill>
           <a:ln/>
         </p:spPr>
+        <p:txBody>
+          <a:bodyPr/>
+          <a:p/>
+        </p:txBody>
       </p:sp>
       <p:sp>
         <p:nvSpPr>
@@ -11429,6 +11579,10 @@
             <a:prstDash val="solid"/>
           </a:ln>
         </p:spPr>
+        <p:txBody>
+          <a:bodyPr/>
+          <a:p/>
+        </p:txBody>
       </p:sp>
       <p:sp>
         <p:nvSpPr>
@@ -11449,6 +11603,10 @@
           </a:solidFill>
           <a:ln/>
         </p:spPr>
+        <p:txBody>
+          <a:bodyPr/>
+          <a:p/>
+        </p:txBody>
       </p:sp>
       <p:pic>
         <p:nvPicPr>
@@ -12431,6 +12589,10 @@
           </a:solidFill>
           <a:ln/>
         </p:spPr>
+        <p:txBody>
+          <a:bodyPr/>
+          <a:p/>
+        </p:txBody>
       </p:sp>
       <p:sp>
         <p:nvSpPr>
@@ -12739,6 +12901,10 @@
           </a:solidFill>
           <a:ln/>
         </p:spPr>
+        <p:txBody>
+          <a:bodyPr/>
+          <a:p/>
+        </p:txBody>
       </p:sp>
       <p:sp>
         <p:nvSpPr>
@@ -12849,6 +13015,10 @@
             <a:prstDash val="solid"/>
           </a:ln>
         </p:spPr>
+        <p:txBody>
+          <a:bodyPr/>
+          <a:p/>
+        </p:txBody>
       </p:sp>
       <p:sp>
         <p:nvSpPr>
@@ -12869,6 +13039,10 @@
           </a:solidFill>
           <a:ln/>
         </p:spPr>
+        <p:txBody>
+          <a:bodyPr/>
+          <a:p/>
+        </p:txBody>
       </p:sp>
       <p:pic>
         <p:nvPicPr>
@@ -13142,6 +13316,10 @@
           </a:gradFill>
           <a:ln/>
         </p:spPr>
+        <p:txBody>
+          <a:bodyPr/>
+          <a:p/>
+        </p:txBody>
       </p:sp>
       <p:sp>
         <p:nvSpPr>
@@ -14394,6 +14572,10 @@
           </a:solidFill>
           <a:ln/>
         </p:spPr>
+        <p:txBody>
+          <a:bodyPr/>
+          <a:p/>
+        </p:txBody>
       </p:sp>
       <p:sp>
         <p:nvSpPr>
@@ -14494,7 +14676,7 @@
                 <a:ea typeface="Courier New" pitchFamily="34" charset="-122"/>
                 <a:cs typeface="Courier New" pitchFamily="34" charset="-120"/>
               </a:rPr>
-              <a:t>S21</a:t>
+              <a:t>S20</a:t>
             </a:r>
             <a:endParaRPr lang="en-US" sz="1800" dirty="0"/>
           </a:p>
@@ -14519,6 +14701,10 @@
           </a:solidFill>
           <a:ln/>
         </p:spPr>
+        <p:txBody>
+          <a:bodyPr/>
+          <a:p/>
+        </p:txBody>
       </p:sp>
       <p:sp>
         <p:nvSpPr>
@@ -14710,7 +14896,7 @@
                 <a:ea typeface="Courier New" pitchFamily="34" charset="-122"/>
                 <a:cs typeface="Courier New" pitchFamily="34" charset="-120"/>
               </a:rPr>
-              <a:t>S23</a:t>
+              <a:t>S22</a:t>
             </a:r>
             <a:endParaRPr lang="en-US" sz="2025" dirty="0"/>
           </a:p>
@@ -15011,6 +15197,10 @@
           </a:solidFill>
           <a:ln/>
         </p:spPr>
+        <p:txBody>
+          <a:bodyPr/>
+          <a:p/>
+        </p:txBody>
       </p:sp>
       <p:sp>
         <p:nvSpPr>
@@ -15163,6 +15353,10 @@
           </a:solidFill>
           <a:ln/>
         </p:spPr>
+        <p:txBody>
+          <a:bodyPr/>
+          <a:p/>
+        </p:txBody>
       </p:sp>
       <p:sp>
         <p:nvSpPr>
@@ -15315,6 +15509,10 @@
           </a:solidFill>
           <a:ln/>
         </p:spPr>
+        <p:txBody>
+          <a:bodyPr/>
+          <a:p/>
+        </p:txBody>
       </p:sp>
       <p:sp>
         <p:nvSpPr>
@@ -15467,6 +15665,10 @@
           </a:solidFill>
           <a:ln/>
         </p:spPr>
+        <p:txBody>
+          <a:bodyPr/>
+          <a:p/>
+        </p:txBody>
       </p:sp>
       <p:sp>
         <p:nvSpPr>
@@ -15619,6 +15821,10 @@
           </a:solidFill>
           <a:ln/>
         </p:spPr>
+        <p:txBody>
+          <a:bodyPr/>
+          <a:p/>
+        </p:txBody>
       </p:sp>
       <p:sp>
         <p:nvSpPr>
@@ -15771,6 +15977,10 @@
           </a:solidFill>
           <a:ln/>
         </p:spPr>
+        <p:txBody>
+          <a:bodyPr/>
+          <a:p/>
+        </p:txBody>
       </p:sp>
       <p:sp>
         <p:nvSpPr>
@@ -15925,6 +16135,10 @@
             <a:prstDash val="solid"/>
           </a:ln>
         </p:spPr>
+        <p:txBody>
+          <a:bodyPr/>
+          <a:p/>
+        </p:txBody>
       </p:sp>
       <p:sp>
         <p:nvSpPr>
@@ -16077,6 +16291,10 @@
           </a:solidFill>
           <a:ln/>
         </p:spPr>
+        <p:txBody>
+          <a:bodyPr/>
+          <a:p/>
+        </p:txBody>
       </p:sp>
       <p:sp>
         <p:nvSpPr>
@@ -16185,6 +16403,10 @@
           </a:solidFill>
           <a:ln/>
         </p:spPr>
+        <p:txBody>
+          <a:bodyPr/>
+          <a:p/>
+        </p:txBody>
       </p:sp>
       <p:pic>
         <p:nvPicPr>
@@ -16423,6 +16645,10 @@
           </a:solidFill>
           <a:ln/>
         </p:spPr>
+        <p:txBody>
+          <a:bodyPr/>
+          <a:p/>
+        </p:txBody>
       </p:sp>
       <p:sp>
         <p:nvSpPr>
@@ -16533,6 +16759,10 @@
             <a:prstDash val="solid"/>
           </a:ln>
         </p:spPr>
+        <p:txBody>
+          <a:bodyPr/>
+          <a:p/>
+        </p:txBody>
       </p:sp>
       <p:sp>
         <p:nvSpPr>
@@ -16599,6 +16829,10 @@
             <a:prstDash val="solid"/>
           </a:ln>
         </p:spPr>
+        <p:txBody>
+          <a:bodyPr/>
+          <a:p/>
+        </p:txBody>
       </p:sp>
       <p:sp>
         <p:nvSpPr>
@@ -16665,6 +16899,10 @@
             <a:prstDash val="solid"/>
           </a:ln>
         </p:spPr>
+        <p:txBody>
+          <a:bodyPr/>
+          <a:p/>
+        </p:txBody>
       </p:sp>
       <p:sp>
         <p:nvSpPr>
@@ -16731,6 +16969,10 @@
             <a:prstDash val="solid"/>
           </a:ln>
         </p:spPr>
+        <p:txBody>
+          <a:bodyPr/>
+          <a:p/>
+        </p:txBody>
       </p:sp>
       <p:sp>
         <p:nvSpPr>
@@ -16797,6 +17039,10 @@
             <a:prstDash val="solid"/>
           </a:ln>
         </p:spPr>
+        <p:txBody>
+          <a:bodyPr/>
+          <a:p/>
+        </p:txBody>
       </p:sp>
       <p:sp>
         <p:nvSpPr>
@@ -16861,6 +17107,10 @@
           </a:solidFill>
           <a:ln/>
         </p:spPr>
+        <p:txBody>
+          <a:bodyPr/>
+          <a:p/>
+        </p:txBody>
       </p:sp>
       <p:sp>
         <p:nvSpPr>
@@ -17013,6 +17263,10 @@
           </a:solidFill>
           <a:ln/>
         </p:spPr>
+        <p:txBody>
+          <a:bodyPr/>
+          <a:p/>
+        </p:txBody>
       </p:sp>
       <p:pic>
         <p:nvPicPr>
@@ -17495,6 +17749,10 @@
           </a:solidFill>
           <a:ln/>
         </p:spPr>
+        <p:txBody>
+          <a:bodyPr/>
+          <a:p/>
+        </p:txBody>
       </p:sp>
       <p:sp>
         <p:nvSpPr>
@@ -17867,6 +18125,10 @@
           </a:solidFill>
           <a:ln/>
         </p:spPr>
+        <p:txBody>
+          <a:bodyPr/>
+          <a:p/>
+        </p:txBody>
       </p:sp>
       <p:sp>
         <p:nvSpPr>
@@ -17931,6 +18193,10 @@
           </a:solidFill>
           <a:ln/>
         </p:spPr>
+        <p:txBody>
+          <a:bodyPr/>
+          <a:p/>
+        </p:txBody>
       </p:sp>
       <p:sp>
         <p:nvSpPr>
@@ -17995,6 +18261,10 @@
           </a:solidFill>
           <a:ln/>
         </p:spPr>
+        <p:txBody>
+          <a:bodyPr/>
+          <a:p/>
+        </p:txBody>
       </p:sp>
       <p:sp>
         <p:nvSpPr>
@@ -18059,6 +18329,10 @@
           </a:solidFill>
           <a:ln/>
         </p:spPr>
+        <p:txBody>
+          <a:bodyPr/>
+          <a:p/>
+        </p:txBody>
       </p:sp>
       <p:sp>
         <p:nvSpPr>
@@ -18115,7 +18389,7 @@
                 <a:ea typeface="Courier New" pitchFamily="34" charset="-122"/>
                 <a:cs typeface="Courier New" pitchFamily="34" charset="-120"/>
               </a:rPr>
-              <a:t>S24</a:t>
+              <a:t>S23</a:t>
             </a:r>
             <a:endParaRPr lang="en-US" sz="1875" dirty="0"/>
           </a:p>
@@ -18140,6 +18414,10 @@
           </a:solidFill>
           <a:ln/>
         </p:spPr>
+        <p:txBody>
+          <a:bodyPr/>
+          <a:p/>
+        </p:txBody>
       </p:sp>
       <p:sp>
         <p:nvSpPr>
@@ -18204,6 +18482,10 @@
           </a:solidFill>
           <a:ln/>
         </p:spPr>
+        <p:txBody>
+          <a:bodyPr/>
+          <a:p/>
+        </p:txBody>
       </p:sp>
       <p:sp>
         <p:nvSpPr>
@@ -18270,6 +18552,10 @@
           </a:solidFill>
           <a:ln/>
         </p:spPr>
+        <p:txBody>
+          <a:bodyPr/>
+          <a:p/>
+        </p:txBody>
       </p:sp>
       <p:sp>
         <p:nvSpPr>
@@ -18336,6 +18622,10 @@
           </a:solidFill>
           <a:ln/>
         </p:spPr>
+        <p:txBody>
+          <a:bodyPr/>
+          <a:p/>
+        </p:txBody>
       </p:sp>
       <p:sp>
         <p:nvSpPr>
@@ -18402,6 +18692,10 @@
           </a:solidFill>
           <a:ln/>
         </p:spPr>
+        <p:txBody>
+          <a:bodyPr/>
+          <a:p/>
+        </p:txBody>
       </p:sp>
       <p:sp>
         <p:nvSpPr>
@@ -18468,6 +18762,10 @@
           </a:solidFill>
           <a:ln/>
         </p:spPr>
+        <p:txBody>
+          <a:bodyPr/>
+          <a:p/>
+        </p:txBody>
       </p:sp>
       <p:sp>
         <p:nvSpPr>
@@ -18554,6 +18852,10 @@
           </a:gradFill>
           <a:ln/>
         </p:spPr>
+        <p:txBody>
+          <a:bodyPr/>
+          <a:p/>
+        </p:txBody>
       </p:sp>
       <p:pic>
         <p:nvPicPr>
@@ -18724,6 +19026,10 @@
           </a:solidFill>
           <a:ln/>
         </p:spPr>
+        <p:txBody>
+          <a:bodyPr/>
+          <a:p/>
+        </p:txBody>
       </p:sp>
       <p:pic>
         <p:nvPicPr>
@@ -18812,6 +19118,10 @@
           </a:solidFill>
           <a:ln/>
         </p:spPr>
+        <p:txBody>
+          <a:bodyPr/>
+          <a:p/>
+        </p:txBody>
       </p:sp>
       <p:sp>
         <p:nvSpPr>
@@ -18964,6 +19274,10 @@
           </a:solidFill>
           <a:ln/>
         </p:spPr>
+        <p:txBody>
+          <a:bodyPr/>
+          <a:p/>
+        </p:txBody>
       </p:sp>
       <p:sp>
         <p:nvSpPr>
@@ -19160,6 +19474,10 @@
           </a:solidFill>
           <a:ln/>
         </p:spPr>
+        <p:txBody>
+          <a:bodyPr/>
+          <a:p/>
+        </p:txBody>
       </p:sp>
       <p:sp>
         <p:nvSpPr>
@@ -19356,6 +19674,10 @@
           </a:solidFill>
           <a:ln/>
         </p:spPr>
+        <p:txBody>
+          <a:bodyPr/>
+          <a:p/>
+        </p:txBody>
       </p:sp>
       <p:sp>
         <p:nvSpPr>
@@ -19552,6 +19874,10 @@
           </a:solidFill>
           <a:ln/>
         </p:spPr>
+        <p:txBody>
+          <a:bodyPr/>
+          <a:p/>
+        </p:txBody>
       </p:sp>
       <p:sp>
         <p:nvSpPr>
@@ -19786,6 +20112,10 @@
           </a:solidFill>
           <a:ln/>
         </p:spPr>
+        <p:txBody>
+          <a:bodyPr/>
+          <a:p/>
+        </p:txBody>
       </p:sp>
       <p:pic>
         <p:nvPicPr>
@@ -19880,6 +20210,10 @@
           </a:solidFill>
           <a:ln/>
         </p:spPr>
+        <p:txBody>
+          <a:bodyPr/>
+          <a:p/>
+        </p:txBody>
       </p:sp>
       <p:sp>
         <p:nvSpPr>
@@ -20481,6 +20815,10 @@
           </a:solidFill>
           <a:ln/>
         </p:spPr>
+        <p:txBody>
+          <a:bodyPr/>
+          <a:p/>
+        </p:txBody>
       </p:sp>
       <p:sp>
         <p:nvSpPr>
@@ -20633,6 +20971,10 @@
           </a:solidFill>
           <a:ln/>
         </p:spPr>
+        <p:txBody>
+          <a:bodyPr/>
+          <a:p/>
+        </p:txBody>
       </p:sp>
       <p:sp>
         <p:nvSpPr>
@@ -20785,6 +21127,10 @@
           </a:solidFill>
           <a:ln/>
         </p:spPr>
+        <p:txBody>
+          <a:bodyPr/>
+          <a:p/>
+        </p:txBody>
       </p:sp>
       <p:sp>
         <p:nvSpPr>
@@ -23060,6 +23406,10 @@
             <a:prstDash val="solid"/>
           </a:ln>
         </p:spPr>
+        <p:txBody>
+          <a:bodyPr/>
+          <a:p/>
+        </p:txBody>
       </p:sp>
       <p:sp>
         <p:nvSpPr>
@@ -23102,6 +23452,10 @@
           </a:gradFill>
           <a:ln/>
         </p:spPr>
+        <p:txBody>
+          <a:bodyPr/>
+          <a:p/>
+        </p:txBody>
       </p:sp>
       <p:sp>
         <p:nvSpPr>
@@ -23229,6 +23583,10 @@
             <a:prstDash val="solid"/>
           </a:ln>
         </p:spPr>
+        <p:txBody>
+          <a:bodyPr/>
+          <a:p/>
+        </p:txBody>
       </p:sp>
       <p:sp>
         <p:nvSpPr>
@@ -23271,6 +23629,10 @@
           </a:gradFill>
           <a:ln/>
         </p:spPr>
+        <p:txBody>
+          <a:bodyPr/>
+          <a:p/>
+        </p:txBody>
       </p:sp>
       <p:sp>
         <p:nvSpPr>
@@ -23398,6 +23760,10 @@
             <a:prstDash val="solid"/>
           </a:ln>
         </p:spPr>
+        <p:txBody>
+          <a:bodyPr/>
+          <a:p/>
+        </p:txBody>
       </p:sp>
       <p:sp>
         <p:nvSpPr>
@@ -23440,6 +23806,10 @@
           </a:gradFill>
           <a:ln/>
         </p:spPr>
+        <p:txBody>
+          <a:bodyPr/>
+          <a:p/>
+        </p:txBody>
       </p:sp>
       <p:sp>
         <p:nvSpPr>
@@ -23567,6 +23937,10 @@
             <a:prstDash val="solid"/>
           </a:ln>
         </p:spPr>
+        <p:txBody>
+          <a:bodyPr/>
+          <a:p/>
+        </p:txBody>
       </p:sp>
       <p:sp>
         <p:nvSpPr>
@@ -23609,6 +23983,10 @@
           </a:gradFill>
           <a:ln/>
         </p:spPr>
+        <p:txBody>
+          <a:bodyPr/>
+          <a:p/>
+        </p:txBody>
       </p:sp>
       <p:sp>
         <p:nvSpPr>
@@ -23734,6 +24112,10 @@
           </a:solidFill>
           <a:ln/>
         </p:spPr>
+        <p:txBody>
+          <a:bodyPr/>
+          <a:p/>
+        </p:txBody>
       </p:sp>
       <p:pic>
         <p:nvPicPr>
@@ -25299,7 +25681,7 @@
                 <a:ea typeface="Arial" pitchFamily="34" charset="-122"/>
                 <a:cs typeface="Arial" pitchFamily="34" charset="-120"/>
               </a:rPr>
-              <a:t>Sources, S17 to S24</a:t>
+              <a:t>Sources, S17 to S23</a:t>
             </a:r>
             <a:endParaRPr lang="en-US" sz="4200" dirty="0"/>
           </a:p>
@@ -25798,7 +26180,7 @@
                 <a:ea typeface="Arial" pitchFamily="34" charset="-122"/>
                 <a:cs typeface="Arial" pitchFamily="34" charset="-120"/>
               </a:rPr>
-              <a:t>Customer-facing ordering bot completes programming homework. </a:t>
+              <a:t>PANDA, Predictive Analytics and Decision Assistant. Rapid Sustainment Office. Selected as an Air Force system of record. DefenseScoop, May 10, 2023</a:t>
             </a:r>
             <a:pPr algn="l" indent="0" marL="0">
               <a:lnSpc>
@@ -25806,17 +26188,6 @@
               </a:lnSpc>
               <a:buNone/>
             </a:pPr>
-            <a:r>
-              <a:rPr lang="en-US" sz="1800" dirty="0">
-                <a:solidFill>
-                  <a:srgbClr val="96968C"/>
-                </a:solidFill>
-                <a:latin typeface="Arial" pitchFamily="34" charset="0"/>
-                <a:ea typeface="Arial" pitchFamily="34" charset="-122"/>
-                <a:cs typeface="Arial" pitchFamily="34" charset="-120"/>
-              </a:rPr>
-              <a:t>Media reporting, 2026</a:t>
-            </a:r>
             <a:endParaRPr lang="en-US" sz="1800" dirty="0"/>
           </a:p>
         </p:txBody>
@@ -25927,7 +26298,7 @@
                 <a:ea typeface="Arial" pitchFamily="34" charset="-122"/>
                 <a:cs typeface="Arial" pitchFamily="34" charset="-120"/>
               </a:rPr>
-              <a:t>PANDA, Predictive Analytics and Decision Assistant. Rapid Sustainment Office. </a:t>
+              <a:t>Air Force Proficiency Code Key. CFETP 2R1X1 and CFETP 3S2X1. Confirmed 26 August 2026</a:t>
             </a:r>
             <a:pPr algn="l" indent="0" marL="0">
               <a:lnSpc>
@@ -25935,17 +26306,6 @@
               </a:lnSpc>
               <a:buNone/>
             </a:pPr>
-            <a:r>
-              <a:rPr lang="en-US" sz="1800" dirty="0">
-                <a:solidFill>
-                  <a:srgbClr val="96968C"/>
-                </a:solidFill>
-                <a:latin typeface="Arial" pitchFamily="34" charset="0"/>
-                <a:ea typeface="Arial" pitchFamily="34" charset="-122"/>
-                <a:cs typeface="Arial" pitchFamily="34" charset="-120"/>
-              </a:rPr>
-              <a:t>Selected as an Air Force system of record. DefenseScoop, May 10, 2023</a:t>
-            </a:r>
             <a:endParaRPr lang="en-US" sz="1800" dirty="0"/>
           </a:p>
         </p:txBody>
@@ -26056,7 +26416,7 @@
                 <a:ea typeface="Arial" pitchFamily="34" charset="-122"/>
                 <a:cs typeface="Arial" pitchFamily="34" charset="-120"/>
               </a:rPr>
-              <a:t>Air Force Proficiency Code Key. </a:t>
+              <a:t>The 10-20-70 rule of AI transformation. Boston Consulting Group. Roughly 10 percent algorithms, 20 percent technology and data, 70 percent people and process</a:t>
             </a:r>
             <a:pPr algn="l" indent="0" marL="0">
               <a:lnSpc>
@@ -26064,17 +26424,6 @@
               </a:lnSpc>
               <a:buNone/>
             </a:pPr>
-            <a:r>
-              <a:rPr lang="en-US" sz="1800" dirty="0">
-                <a:solidFill>
-                  <a:srgbClr val="96968C"/>
-                </a:solidFill>
-                <a:latin typeface="Arial" pitchFamily="34" charset="0"/>
-                <a:ea typeface="Arial" pitchFamily="34" charset="-122"/>
-                <a:cs typeface="Arial" pitchFamily="34" charset="-120"/>
-              </a:rPr>
-              <a:t>CFETP 2R1X1 and CFETP 3S2X1. Confirmed 26 August 2026</a:t>
-            </a:r>
             <a:endParaRPr lang="en-US" sz="1800" dirty="0"/>
           </a:p>
         </p:txBody>
@@ -26185,7 +26534,7 @@
                 <a:ea typeface="Arial" pitchFamily="34" charset="-122"/>
                 <a:cs typeface="Arial" pitchFamily="34" charset="-120"/>
               </a:rPr>
-              <a:t>The 10-20-70 rule of AI transformation. </a:t>
+              <a:t>Large reasoning models as autonomous jailbreak agents. Nature Communications, 2026. 97.14 percent jailbreak success rate across model combinations</a:t>
             </a:r>
             <a:pPr algn="l" indent="0" marL="0">
               <a:lnSpc>
@@ -26193,146 +26542,6 @@
               </a:lnSpc>
               <a:buNone/>
             </a:pPr>
-            <a:r>
-              <a:rPr lang="en-US" sz="1800" dirty="0">
-                <a:solidFill>
-                  <a:srgbClr val="96968C"/>
-                </a:solidFill>
-                <a:latin typeface="Arial" pitchFamily="34" charset="0"/>
-                <a:ea typeface="Arial" pitchFamily="34" charset="-122"/>
-                <a:cs typeface="Arial" pitchFamily="34" charset="-120"/>
-              </a:rPr>
-              <a:t>Boston Consulting Group. Roughly 10 percent algorithms, 20 percent technology and data, 70 percent people and process</a:t>
-            </a:r>
-            <a:endParaRPr lang="en-US" sz="1800" dirty="0"/>
-          </a:p>
-        </p:txBody>
-      </p:sp>
-      <p:sp>
-        <p:nvSpPr>
-          <p:cNvPr id="26" name="Shape 23"/>
-          <p:cNvSpPr/>
-          <p:nvPr/>
-        </p:nvSpPr>
-        <p:spPr>
-          <a:xfrm>
-            <a:off x="9525000" y="6869708"/>
-            <a:ext cx="614759" cy="317500"/>
-          </a:xfrm>
-          <a:prstGeom prst="roundRect">
-            <a:avLst>
-              <a:gd name="adj" fmla="val 6000"/>
-            </a:avLst>
-          </a:prstGeom>
-          <a:ln w="6350">
-            <a:solidFill>
-              <a:srgbClr val="DCAFFF"/>
-            </a:solidFill>
-            <a:prstDash val="solid"/>
-          </a:ln>
-        </p:spPr>
-      </p:sp>
-      <p:sp>
-        <p:nvSpPr>
-          <p:cNvPr id="27" name="Text 24"/>
-          <p:cNvSpPr/>
-          <p:nvPr/>
-        </p:nvSpPr>
-        <p:spPr>
-          <a:xfrm>
-            <a:off x="9626600" y="6914158"/>
-            <a:ext cx="473035" cy="266700"/>
-          </a:xfrm>
-          <a:prstGeom prst="rect">
-            <a:avLst/>
-          </a:prstGeom>
-          <a:noFill/>
-          <a:ln/>
-        </p:spPr>
-        <p:txBody>
-          <a:bodyPr wrap="none" lIns="25400" tIns="25400" rIns="25400" bIns="25400" rtlCol="0" anchor="t">
-            <a:normAutofit/>
-          </a:bodyPr>
-          <a:lstStyle/>
-          <a:p>
-            <a:pPr algn="l" indent="0" marL="0">
-              <a:lnSpc>
-                <a:spcPct val="87805"/>
-              </a:lnSpc>
-              <a:buNone/>
-            </a:pPr>
-            <a:r>
-              <a:rPr lang="en-US" sz="1800" dirty="0">
-                <a:solidFill>
-                  <a:srgbClr val="7500C0"/>
-                </a:solidFill>
-                <a:latin typeface="Courier New" pitchFamily="34" charset="0"/>
-                <a:ea typeface="Courier New" pitchFamily="34" charset="-122"/>
-                <a:cs typeface="Courier New" pitchFamily="34" charset="-120"/>
-              </a:rPr>
-              <a:t>S24</a:t>
-            </a:r>
-            <a:endParaRPr lang="en-US" sz="1800" dirty="0"/>
-          </a:p>
-        </p:txBody>
-      </p:sp>
-      <p:sp>
-        <p:nvSpPr>
-          <p:cNvPr id="28" name="Text 25"/>
-          <p:cNvSpPr/>
-          <p:nvPr/>
-        </p:nvSpPr>
-        <p:spPr>
-          <a:xfrm>
-            <a:off x="10292160" y="6850658"/>
-            <a:ext cx="7058426" cy="970161"/>
-          </a:xfrm>
-          <a:prstGeom prst="rect">
-            <a:avLst/>
-          </a:prstGeom>
-          <a:noFill/>
-          <a:ln/>
-        </p:spPr>
-        <p:txBody>
-          <a:bodyPr wrap="square" lIns="25400" tIns="25400" rIns="25400" bIns="25400" rtlCol="0" anchor="t">
-            <a:normAutofit/>
-          </a:bodyPr>
-          <a:lstStyle/>
-          <a:p>
-            <a:pPr algn="l" indent="0" marL="0">
-              <a:lnSpc>
-                <a:spcPct val="115714"/>
-              </a:lnSpc>
-              <a:buNone/>
-            </a:pPr>
-            <a:r>
-              <a:rPr lang="en-US" sz="1800" b="1" dirty="0">
-                <a:solidFill>
-                  <a:srgbClr val="000000"/>
-                </a:solidFill>
-                <a:latin typeface="Arial" pitchFamily="34" charset="0"/>
-                <a:ea typeface="Arial" pitchFamily="34" charset="-122"/>
-                <a:cs typeface="Arial" pitchFamily="34" charset="-120"/>
-              </a:rPr>
-              <a:t>Large reasoning models as autonomous jailbreak agents. </a:t>
-            </a:r>
-            <a:pPr algn="l" indent="0" marL="0">
-              <a:lnSpc>
-                <a:spcPct val="115714"/>
-              </a:lnSpc>
-              <a:buNone/>
-            </a:pPr>
-            <a:r>
-              <a:rPr lang="en-US" sz="1800" dirty="0">
-                <a:solidFill>
-                  <a:srgbClr val="96968C"/>
-                </a:solidFill>
-                <a:latin typeface="Arial" pitchFamily="34" charset="0"/>
-                <a:ea typeface="Arial" pitchFamily="34" charset="-122"/>
-                <a:cs typeface="Arial" pitchFamily="34" charset="-120"/>
-              </a:rPr>
-              <a:t>Nature Communications, 2026. 97.14 percent jailbreak success rate across model combinations</a:t>
-            </a:r>
             <a:endParaRPr lang="en-US" sz="1800" dirty="0"/>
           </a:p>
         </p:txBody>
@@ -26546,6 +26755,10 @@
             <a:prstDash val="solid"/>
           </a:ln>
         </p:spPr>
+        <p:txBody>
+          <a:bodyPr/>
+          <a:p/>
+        </p:txBody>
       </p:sp>
       <p:sp>
         <p:nvSpPr>
@@ -26588,6 +26801,10 @@
           </a:gradFill>
           <a:ln/>
         </p:spPr>
+        <p:txBody>
+          <a:bodyPr/>
+          <a:p/>
+        </p:txBody>
       </p:sp>
       <p:sp>
         <p:nvSpPr>
@@ -26759,6 +26976,10 @@
             <a:prstDash val="solid"/>
           </a:ln>
         </p:spPr>
+        <p:txBody>
+          <a:bodyPr/>
+          <a:p/>
+        </p:txBody>
       </p:sp>
       <p:sp>
         <p:nvSpPr>
@@ -26801,6 +27022,10 @@
           </a:gradFill>
           <a:ln/>
         </p:spPr>
+        <p:txBody>
+          <a:bodyPr/>
+          <a:p/>
+        </p:txBody>
       </p:sp>
       <p:sp>
         <p:nvSpPr>
@@ -26972,6 +27197,10 @@
             <a:prstDash val="solid"/>
           </a:ln>
         </p:spPr>
+        <p:txBody>
+          <a:bodyPr/>
+          <a:p/>
+        </p:txBody>
       </p:sp>
       <p:sp>
         <p:nvSpPr>
@@ -27014,6 +27243,10 @@
           </a:gradFill>
           <a:ln/>
         </p:spPr>
+        <p:txBody>
+          <a:bodyPr/>
+          <a:p/>
+        </p:txBody>
       </p:sp>
       <p:sp>
         <p:nvSpPr>
@@ -27212,6 +27445,10 @@
             <a:prstDash val="solid"/>
           </a:ln>
         </p:spPr>
+        <p:txBody>
+          <a:bodyPr/>
+          <a:p/>
+        </p:txBody>
       </p:sp>
       <p:sp>
         <p:nvSpPr>
@@ -27254,6 +27491,10 @@
           </a:gradFill>
           <a:ln/>
         </p:spPr>
+        <p:txBody>
+          <a:bodyPr/>
+          <a:p/>
+        </p:txBody>
       </p:sp>
       <p:sp>
         <p:nvSpPr>
@@ -27585,6 +27826,10 @@
           </a:gradFill>
           <a:ln/>
         </p:spPr>
+        <p:txBody>
+          <a:bodyPr/>
+          <a:p/>
+        </p:txBody>
       </p:sp>
       <p:sp>
         <p:nvSpPr>
@@ -28267,6 +28512,10 @@
           </a:solidFill>
           <a:ln/>
         </p:spPr>
+        <p:txBody>
+          <a:bodyPr/>
+          <a:p/>
+        </p:txBody>
       </p:sp>
       <p:sp>
         <p:nvSpPr>
@@ -28392,6 +28641,10 @@
           </a:solidFill>
           <a:ln/>
         </p:spPr>
+        <p:txBody>
+          <a:bodyPr/>
+          <a:p/>
+        </p:txBody>
       </p:sp>
       <p:sp>
         <p:nvSpPr>
@@ -28500,6 +28753,10 @@
           </a:solidFill>
           <a:ln/>
         </p:spPr>
+        <p:txBody>
+          <a:bodyPr/>
+          <a:p/>
+        </p:txBody>
       </p:sp>
       <p:pic>
         <p:nvPicPr>
@@ -28914,6 +29171,10 @@
           </a:solidFill>
           <a:ln/>
         </p:spPr>
+        <p:txBody>
+          <a:bodyPr/>
+          <a:p/>
+        </p:txBody>
       </p:sp>
       <p:sp>
         <p:nvSpPr>
@@ -28978,6 +29239,10 @@
           </a:solidFill>
           <a:ln/>
         </p:spPr>
+        <p:txBody>
+          <a:bodyPr/>
+          <a:p/>
+        </p:txBody>
       </p:sp>
       <p:sp>
         <p:nvSpPr>
@@ -29103,6 +29368,10 @@
           </a:solidFill>
           <a:ln/>
         </p:spPr>
+        <p:txBody>
+          <a:bodyPr/>
+          <a:p/>
+        </p:txBody>
       </p:sp>
       <p:sp>
         <p:nvSpPr>
@@ -29228,6 +29497,10 @@
           </a:solidFill>
           <a:ln/>
         </p:spPr>
+        <p:txBody>
+          <a:bodyPr/>
+          <a:p/>
+        </p:txBody>
       </p:sp>
       <p:sp>
         <p:nvSpPr>
@@ -29355,6 +29628,10 @@
           </a:solidFill>
           <a:ln/>
         </p:spPr>
+        <p:txBody>
+          <a:bodyPr/>
+          <a:p/>
+        </p:txBody>
       </p:sp>
       <p:sp>
         <p:nvSpPr>
@@ -29480,6 +29757,10 @@
           </a:solidFill>
           <a:ln/>
         </p:spPr>
+        <p:txBody>
+          <a:bodyPr/>
+          <a:p/>
+        </p:txBody>
       </p:sp>
       <p:sp>
         <p:nvSpPr>
@@ -29544,6 +29825,10 @@
           </a:solidFill>
           <a:ln/>
         </p:spPr>
+        <p:txBody>
+          <a:bodyPr/>
+          <a:p/>
+        </p:txBody>
       </p:sp>
       <p:sp>
         <p:nvSpPr>
@@ -29669,6 +29954,10 @@
           </a:solidFill>
           <a:ln/>
         </p:spPr>
+        <p:txBody>
+          <a:bodyPr/>
+          <a:p/>
+        </p:txBody>
       </p:sp>
       <p:sp>
         <p:nvSpPr>
@@ -29794,6 +30083,10 @@
           </a:solidFill>
           <a:ln/>
         </p:spPr>
+        <p:txBody>
+          <a:bodyPr/>
+          <a:p/>
+        </p:txBody>
       </p:sp>
       <p:sp>
         <p:nvSpPr>
@@ -29919,6 +30212,10 @@
           </a:solidFill>
           <a:ln/>
         </p:spPr>
+        <p:txBody>
+          <a:bodyPr/>
+          <a:p/>
+        </p:txBody>
       </p:sp>
       <p:sp>
         <p:nvSpPr>
@@ -30044,6 +30341,10 @@
           </a:solidFill>
           <a:ln/>
         </p:spPr>
+        <p:txBody>
+          <a:bodyPr/>
+          <a:p/>
+        </p:txBody>
       </p:sp>
       <p:sp>
         <p:nvSpPr>
@@ -30178,7 +30479,7 @@
                 <a:ea typeface="Courier New" pitchFamily="34" charset="-122"/>
                 <a:cs typeface="Courier New" pitchFamily="34" charset="-120"/>
               </a:rPr>
-              <a:t>S22</a:t>
+              <a:t>S21</a:t>
             </a:r>
             <a:endParaRPr lang="en-US" sz="1800" dirty="0"/>
           </a:p>
@@ -30479,6 +30780,10 @@
           </a:solidFill>
           <a:ln/>
         </p:spPr>
+        <p:txBody>
+          <a:bodyPr/>
+          <a:p/>
+        </p:txBody>
       </p:sp>
       <p:sp>
         <p:nvSpPr>
@@ -30675,6 +30980,10 @@
           </a:solidFill>
           <a:ln/>
         </p:spPr>
+        <p:txBody>
+          <a:bodyPr/>
+          <a:p/>
+        </p:txBody>
       </p:sp>
       <p:sp>
         <p:nvSpPr>
@@ -30739,6 +31048,10 @@
           </a:solidFill>
           <a:ln/>
         </p:spPr>
+        <p:txBody>
+          <a:bodyPr/>
+          <a:p/>
+        </p:txBody>
       </p:sp>
       <p:sp>
         <p:nvSpPr>
@@ -30935,6 +31248,10 @@
           </a:solidFill>
           <a:ln/>
         </p:spPr>
+        <p:txBody>
+          <a:bodyPr/>
+          <a:p/>
+        </p:txBody>
       </p:sp>
       <p:sp>
         <p:nvSpPr>
@@ -30999,6 +31316,10 @@
           </a:solidFill>
           <a:ln/>
         </p:spPr>
+        <p:txBody>
+          <a:bodyPr/>
+          <a:p/>
+        </p:txBody>
       </p:sp>
       <p:sp>
         <p:nvSpPr>
@@ -31195,6 +31516,10 @@
           </a:solidFill>
           <a:ln/>
         </p:spPr>
+        <p:txBody>
+          <a:bodyPr/>
+          <a:p/>
+        </p:txBody>
       </p:sp>
       <p:sp>
         <p:nvSpPr>
@@ -31259,6 +31584,10 @@
           </a:solidFill>
           <a:ln/>
         </p:spPr>
+        <p:txBody>
+          <a:bodyPr/>
+          <a:p/>
+        </p:txBody>
       </p:sp>
       <p:sp>
         <p:nvSpPr>
@@ -31689,6 +32018,10 @@
           </a:solidFill>
           <a:ln/>
         </p:spPr>
+        <p:txBody>
+          <a:bodyPr/>
+          <a:p/>
+        </p:txBody>
       </p:sp>
       <p:sp>
         <p:nvSpPr>
@@ -31757,6 +32090,10 @@
             <a:prstDash val="solid"/>
           </a:ln>
         </p:spPr>
+        <p:txBody>
+          <a:bodyPr/>
+          <a:p/>
+        </p:txBody>
       </p:sp>
       <p:sp>
         <p:nvSpPr>
@@ -31827,6 +32164,10 @@
             <a:prstDash val="solid"/>
           </a:ln>
         </p:spPr>
+        <p:txBody>
+          <a:bodyPr/>
+          <a:p/>
+        </p:txBody>
       </p:sp>
       <p:sp>
         <p:nvSpPr>
